--- a/РВиП/практики/Практика 3.pptx
+++ b/РВиП/практики/Практика 3.pptx
@@ -6,8 +6,15 @@
   </p:sldMasterIdLst>
   <p:sldIdLst>
     <p:sldId id="256" r:id="rId2"/>
-    <p:sldId id="257" r:id="rId3"/>
-    <p:sldId id="259" r:id="rId4"/>
+    <p:sldId id="260" r:id="rId3"/>
+    <p:sldId id="261" r:id="rId4"/>
+    <p:sldId id="262" r:id="rId5"/>
+    <p:sldId id="257" r:id="rId6"/>
+    <p:sldId id="259" r:id="rId7"/>
+    <p:sldId id="263" r:id="rId8"/>
+    <p:sldId id="264" r:id="rId9"/>
+    <p:sldId id="265" r:id="rId10"/>
+    <p:sldId id="266" r:id="rId11"/>
   </p:sldIdLst>
   <p:sldSz cx="9144000" cy="6858000" type="screen4x3"/>
   <p:notesSz cx="6858000" cy="9144000"/>
@@ -304,7 +311,7 @@
             <a:fld id="{9E1DBA9E-009E-4185-A20A-A3E4255DE3B3}" type="datetimeFigureOut">
               <a:rPr lang="ru-RU" smtClean="0"/>
               <a:pPr/>
-              <a:t>04.08.2026</a:t>
+              <a:t>06.10.2026</a:t>
             </a:fld>
             <a:endParaRPr lang="ru-RU"/>
           </a:p>
@@ -659,7 +666,7 @@
             <a:fld id="{9E1DBA9E-009E-4185-A20A-A3E4255DE3B3}" type="datetimeFigureOut">
               <a:rPr lang="ru-RU" smtClean="0"/>
               <a:pPr/>
-              <a:t>04.08.2026</a:t>
+              <a:t>06.10.2026</a:t>
             </a:fld>
             <a:endParaRPr lang="ru-RU"/>
           </a:p>
@@ -836,7 +843,7 @@
             <a:fld id="{9E1DBA9E-009E-4185-A20A-A3E4255DE3B3}" type="datetimeFigureOut">
               <a:rPr lang="ru-RU" smtClean="0"/>
               <a:pPr/>
-              <a:t>04.08.2026</a:t>
+              <a:t>06.10.2026</a:t>
             </a:fld>
             <a:endParaRPr lang="ru-RU"/>
           </a:p>
@@ -951,7 +958,7 @@
             <a:fld id="{9E1DBA9E-009E-4185-A20A-A3E4255DE3B3}" type="datetimeFigureOut">
               <a:rPr lang="ru-RU" smtClean="0"/>
               <a:pPr/>
-              <a:t>04.08.2026</a:t>
+              <a:t>06.10.2026</a:t>
             </a:fld>
             <a:endParaRPr lang="ru-RU"/>
           </a:p>
@@ -1311,7 +1318,7 @@
             <a:fld id="{9E1DBA9E-009E-4185-A20A-A3E4255DE3B3}" type="datetimeFigureOut">
               <a:rPr lang="ru-RU" smtClean="0"/>
               <a:pPr/>
-              <a:t>04.08.2026</a:t>
+              <a:t>06.10.2026</a:t>
             </a:fld>
             <a:endParaRPr lang="ru-RU"/>
           </a:p>
@@ -1578,7 +1585,7 @@
             <a:fld id="{9E1DBA9E-009E-4185-A20A-A3E4255DE3B3}" type="datetimeFigureOut">
               <a:rPr lang="ru-RU" smtClean="0"/>
               <a:pPr/>
-              <a:t>04.08.2026</a:t>
+              <a:t>06.10.2026</a:t>
             </a:fld>
             <a:endParaRPr lang="ru-RU"/>
           </a:p>
@@ -1942,7 +1949,7 @@
             <a:fld id="{9E1DBA9E-009E-4185-A20A-A3E4255DE3B3}" type="datetimeFigureOut">
               <a:rPr lang="ru-RU" smtClean="0"/>
               <a:pPr/>
-              <a:t>04.08.2026</a:t>
+              <a:t>06.10.2026</a:t>
             </a:fld>
             <a:endParaRPr lang="ru-RU"/>
           </a:p>
@@ -2171,7 +2178,7 @@
             <a:fld id="{9E1DBA9E-009E-4185-A20A-A3E4255DE3B3}" type="datetimeFigureOut">
               <a:rPr lang="ru-RU" smtClean="0"/>
               <a:pPr/>
-              <a:t>04.08.2026</a:t>
+              <a:t>06.10.2026</a:t>
             </a:fld>
             <a:endParaRPr lang="ru-RU"/>
           </a:p>
@@ -2263,7 +2270,7 @@
             <a:fld id="{9E1DBA9E-009E-4185-A20A-A3E4255DE3B3}" type="datetimeFigureOut">
               <a:rPr lang="ru-RU" smtClean="0"/>
               <a:pPr/>
-              <a:t>04.08.2026</a:t>
+              <a:t>06.10.2026</a:t>
             </a:fld>
             <a:endParaRPr lang="ru-RU"/>
           </a:p>
@@ -2532,7 +2539,7 @@
             <a:fld id="{9E1DBA9E-009E-4185-A20A-A3E4255DE3B3}" type="datetimeFigureOut">
               <a:rPr lang="ru-RU" smtClean="0"/>
               <a:pPr/>
-              <a:t>04.08.2026</a:t>
+              <a:t>06.10.2026</a:t>
             </a:fld>
             <a:endParaRPr lang="ru-RU"/>
           </a:p>
@@ -2762,7 +2769,7 @@
             <a:fld id="{9E1DBA9E-009E-4185-A20A-A3E4255DE3B3}" type="datetimeFigureOut">
               <a:rPr lang="ru-RU" smtClean="0"/>
               <a:pPr/>
-              <a:t>04.08.2026</a:t>
+              <a:t>06.10.2026</a:t>
             </a:fld>
             <a:endParaRPr lang="ru-RU"/>
           </a:p>
@@ -3263,7 +3270,7 @@
             <a:fld id="{9E1DBA9E-009E-4185-A20A-A3E4255DE3B3}" type="datetimeFigureOut">
               <a:rPr lang="ru-RU" smtClean="0"/>
               <a:pPr/>
-              <a:t>04.08.2026</a:t>
+              <a:t>06.10.2026</a:t>
             </a:fld>
             <a:endParaRPr lang="ru-RU"/>
           </a:p>
@@ -3699,6 +3706,97 @@
 </p:sld>
 </file>
 
+<file path=ppt/slides/slide10.xml><?xml version="1.0" encoding="utf-8"?>
+<p:sld xmlns:a="http://schemas.openxmlformats.org/drawingml/2006/main" xmlns:r="http://schemas.openxmlformats.org/officeDocument/2006/relationships" xmlns:p="http://schemas.openxmlformats.org/presentationml/2006/main">
+  <p:cSld>
+    <p:spTree>
+      <p:nvGrpSpPr>
+        <p:cNvPr id="1" name=""/>
+        <p:cNvGrpSpPr/>
+        <p:nvPr/>
+      </p:nvGrpSpPr>
+      <p:grpSpPr>
+        <a:xfrm>
+          <a:off x="0" y="0"/>
+          <a:ext cx="0" cy="0"/>
+          <a:chOff x="0" y="0"/>
+          <a:chExt cx="0" cy="0"/>
+        </a:xfrm>
+      </p:grpSpPr>
+      <p:pic>
+        <p:nvPicPr>
+          <p:cNvPr id="17410" name="Picture 2"/>
+          <p:cNvPicPr>
+            <a:picLocks noChangeAspect="1" noChangeArrowheads="1"/>
+          </p:cNvPicPr>
+          <p:nvPr/>
+        </p:nvPicPr>
+        <p:blipFill>
+          <a:blip r:embed="rId2"/>
+          <a:srcRect/>
+          <a:stretch>
+            <a:fillRect/>
+          </a:stretch>
+        </p:blipFill>
+        <p:spPr bwMode="auto">
+          <a:xfrm>
+            <a:off x="214282" y="142852"/>
+            <a:ext cx="5648325" cy="5267325"/>
+          </a:xfrm>
+          <a:prstGeom prst="rect">
+            <a:avLst/>
+          </a:prstGeom>
+          <a:noFill/>
+          <a:ln w="9525">
+            <a:noFill/>
+            <a:miter lim="800000"/>
+            <a:headEnd/>
+            <a:tailEnd/>
+          </a:ln>
+          <a:effectLst/>
+        </p:spPr>
+      </p:pic>
+      <p:pic>
+        <p:nvPicPr>
+          <p:cNvPr id="17411" name="Picture 3"/>
+          <p:cNvPicPr>
+            <a:picLocks noChangeAspect="1" noChangeArrowheads="1"/>
+          </p:cNvPicPr>
+          <p:nvPr/>
+        </p:nvPicPr>
+        <p:blipFill>
+          <a:blip r:embed="rId3"/>
+          <a:srcRect/>
+          <a:stretch>
+            <a:fillRect/>
+          </a:stretch>
+        </p:blipFill>
+        <p:spPr bwMode="auto">
+          <a:xfrm>
+            <a:off x="3286116" y="5000636"/>
+            <a:ext cx="5419725" cy="1743075"/>
+          </a:xfrm>
+          <a:prstGeom prst="rect">
+            <a:avLst/>
+          </a:prstGeom>
+          <a:noFill/>
+          <a:ln w="9525">
+            <a:noFill/>
+            <a:miter lim="800000"/>
+            <a:headEnd/>
+            <a:tailEnd/>
+          </a:ln>
+          <a:effectLst/>
+        </p:spPr>
+      </p:pic>
+    </p:spTree>
+  </p:cSld>
+  <p:clrMapOvr>
+    <a:masterClrMapping/>
+  </p:clrMapOvr>
+</p:sld>
+</file>
+
 <file path=ppt/slides/slide2.xml><?xml version="1.0" encoding="utf-8"?>
 <p:sld xmlns:a="http://schemas.openxmlformats.org/drawingml/2006/main" xmlns:r="http://schemas.openxmlformats.org/officeDocument/2006/relationships" xmlns:p="http://schemas.openxmlformats.org/presentationml/2006/main">
   <p:cSld>
@@ -3718,14 +3816,14 @@
       </p:grpSpPr>
       <p:sp>
         <p:nvSpPr>
-          <p:cNvPr id="9" name="Прямоугольник 8"/>
+          <p:cNvPr id="3" name="Прямоугольник 2"/>
           <p:cNvSpPr/>
           <p:nvPr/>
         </p:nvSpPr>
         <p:spPr>
           <a:xfrm>
-            <a:off x="1" y="1214422"/>
-            <a:ext cx="9144000" cy="1938992"/>
+            <a:off x="0" y="751344"/>
+            <a:ext cx="9144000" cy="4524315"/>
           </a:xfrm>
           <a:prstGeom prst="rect">
             <a:avLst/>
@@ -3737,58 +3835,92 @@
           </a:bodyPr>
           <a:lstStyle/>
           <a:p>
-            <a:r>
-              <a:rPr lang="en-US" sz="2400" dirty="0" err="1" smtClean="0"/>
+            <a:pPr algn="just"/>
+            <a:r>
+              <a:rPr lang="ru-RU" sz="2400" dirty="0" smtClean="0"/>
+              <a:t>RPC (</a:t>
+            </a:r>
+            <a:r>
+              <a:rPr lang="ru-RU" sz="2400" dirty="0" err="1" smtClean="0"/>
+              <a:t>Remote</a:t>
+            </a:r>
+            <a:r>
+              <a:rPr lang="ru-RU" sz="2400" dirty="0" smtClean="0"/>
+              <a:t> </a:t>
+            </a:r>
+            <a:r>
+              <a:rPr lang="ru-RU" sz="2400" dirty="0" err="1" smtClean="0"/>
+              <a:t>Procedure</a:t>
+            </a:r>
+            <a:r>
+              <a:rPr lang="ru-RU" sz="2400" dirty="0" smtClean="0"/>
+              <a:t> </a:t>
+            </a:r>
+            <a:r>
+              <a:rPr lang="ru-RU" sz="2400" dirty="0" err="1" smtClean="0"/>
+              <a:t>Call</a:t>
+            </a:r>
+            <a:r>
+              <a:rPr lang="ru-RU" sz="2400" dirty="0" smtClean="0"/>
+              <a:t>) — это модель взаимодействия, при которой код на одном компьютере вызывает функцию на другом так, будто она локальная: для разработчика вызов выглядит как обычный вызов метода, а всю работу по передаче данных берёт на себя инфраструктура. XML‑RPC — одна из реализаций RPC: она использует HTTP как транспорт и XML как формат представления данных, то есть запрос и ответ упаковываются в </a:t>
+            </a:r>
+            <a:r>
+              <a:rPr lang="ru-RU" sz="2400" dirty="0" err="1" smtClean="0"/>
+              <a:t>XML‑документы</a:t>
+            </a:r>
+            <a:r>
+              <a:rPr lang="ru-RU" sz="2400" dirty="0" smtClean="0"/>
+              <a:t>, передаваемые через HTTP POST. В </a:t>
+            </a:r>
+            <a:r>
+              <a:rPr lang="ru-RU" sz="2400" dirty="0" err="1" smtClean="0"/>
+              <a:t>Python</a:t>
+            </a:r>
+            <a:r>
+              <a:rPr lang="ru-RU" sz="2400" dirty="0" smtClean="0"/>
+              <a:t> это реализовано в модулях </a:t>
+            </a:r>
+            <a:r>
+              <a:rPr lang="ru-RU" sz="2400" dirty="0" err="1" smtClean="0"/>
+              <a:t>xmlrpc.server</a:t>
+            </a:r>
+            <a:r>
+              <a:rPr lang="ru-RU" sz="2400" dirty="0" smtClean="0"/>
+              <a:t> и </a:t>
+            </a:r>
+            <a:r>
+              <a:rPr lang="ru-RU" sz="2400" dirty="0" err="1" smtClean="0"/>
               <a:t>xmlrpc.client</a:t>
             </a:r>
             <a:r>
-              <a:rPr lang="en-US" sz="2400" dirty="0" smtClean="0"/>
-              <a:t> — XML-RPC client access</a:t>
-            </a:r>
-          </a:p>
-          <a:p>
-            <a:r>
-              <a:rPr lang="en-US" sz="2400" dirty="0" smtClean="0">
-                <a:hlinkClick r:id="rId2"/>
-              </a:rPr>
-              <a:t>https://docs.python.org/3/library/xmlrpc.client.html#module-xmlrpc.client</a:t>
-            </a:r>
-            <a:endParaRPr lang="ru-RU" sz="2400" dirty="0" smtClean="0"/>
-          </a:p>
-          <a:p>
-            <a:endParaRPr lang="en-US" sz="2400" dirty="0" smtClean="0"/>
-          </a:p>
-          <a:p>
-            <a:endParaRPr lang="en-US" sz="2400" dirty="0"/>
-          </a:p>
-        </p:txBody>
-      </p:sp>
-      <p:sp>
-        <p:nvSpPr>
-          <p:cNvPr id="10" name="Заголовок 1"/>
-          <p:cNvSpPr>
-            <a:spLocks noGrp="1"/>
-          </p:cNvSpPr>
-          <p:nvPr>
-            <p:ph type="title"/>
-          </p:nvPr>
-        </p:nvSpPr>
-        <p:spPr>
-          <a:xfrm>
-            <a:off x="928662" y="-357214"/>
-            <a:ext cx="7772400" cy="1143000"/>
-          </a:xfrm>
-        </p:spPr>
-        <p:txBody>
-          <a:bodyPr/>
-          <a:lstStyle/>
-          <a:p>
-            <a:pPr algn="ctr"/>
-            <a:r>
-              <a:rPr lang="ru-RU" dirty="0" smtClean="0"/>
-              <a:t>Дополнительные ссылки</a:t>
-            </a:r>
-            <a:endParaRPr lang="ru-RU" dirty="0"/>
+              <a:rPr lang="ru-RU" sz="2400" dirty="0" smtClean="0"/>
+              <a:t>: клиент работает через </a:t>
+            </a:r>
+            <a:r>
+              <a:rPr lang="ru-RU" sz="2400" dirty="0" err="1" smtClean="0"/>
+              <a:t>прокси‑объект</a:t>
+            </a:r>
+            <a:r>
+              <a:rPr lang="ru-RU" sz="2400" dirty="0" smtClean="0"/>
+              <a:t> (</a:t>
+            </a:r>
+            <a:r>
+              <a:rPr lang="ru-RU" sz="2400" dirty="0" err="1" smtClean="0"/>
+              <a:t>ServerProxy</a:t>
+            </a:r>
+            <a:r>
+              <a:rPr lang="ru-RU" sz="2400" dirty="0" smtClean="0"/>
+              <a:t>), который скрывает удалённость вызова, а сервер регистрирует функции и обрабатывает входящие </a:t>
+            </a:r>
+            <a:r>
+              <a:rPr lang="ru-RU" sz="2400" dirty="0" err="1" smtClean="0"/>
+              <a:t>XML‑запросы</a:t>
+            </a:r>
+            <a:r>
+              <a:rPr lang="ru-RU" sz="2400" dirty="0" smtClean="0"/>
+              <a:t>.</a:t>
+            </a:r>
+            <a:endParaRPr lang="ru-RU" sz="2400" dirty="0"/>
           </a:p>
         </p:txBody>
       </p:sp>
@@ -3819,6 +3951,978 @@
       </p:grpSpPr>
       <p:sp>
         <p:nvSpPr>
+          <p:cNvPr id="3" name="Прямоугольник 2"/>
+          <p:cNvSpPr/>
+          <p:nvPr/>
+        </p:nvSpPr>
+        <p:spPr>
+          <a:xfrm>
+            <a:off x="0" y="751344"/>
+            <a:ext cx="9144000" cy="4893647"/>
+          </a:xfrm>
+          <a:prstGeom prst="rect">
+            <a:avLst/>
+          </a:prstGeom>
+        </p:spPr>
+        <p:txBody>
+          <a:bodyPr wrap="square">
+            <a:spAutoFit/>
+          </a:bodyPr>
+          <a:lstStyle/>
+          <a:p>
+            <a:pPr algn="just"/>
+            <a:r>
+              <a:rPr lang="ru-RU" sz="2400" dirty="0" smtClean="0"/>
+              <a:t>XML (</a:t>
+            </a:r>
+            <a:r>
+              <a:rPr lang="ru-RU" sz="2400" dirty="0" err="1" smtClean="0"/>
+              <a:t>eXtensible</a:t>
+            </a:r>
+            <a:r>
+              <a:rPr lang="ru-RU" sz="2400" dirty="0" smtClean="0"/>
+              <a:t> </a:t>
+            </a:r>
+            <a:r>
+              <a:rPr lang="ru-RU" sz="2400" dirty="0" err="1" smtClean="0"/>
+              <a:t>Markup</a:t>
+            </a:r>
+            <a:r>
+              <a:rPr lang="ru-RU" sz="2400" dirty="0" smtClean="0"/>
+              <a:t> </a:t>
+            </a:r>
+            <a:r>
+              <a:rPr lang="ru-RU" sz="2400" dirty="0" err="1" smtClean="0"/>
+              <a:t>Language</a:t>
+            </a:r>
+            <a:r>
+              <a:rPr lang="ru-RU" sz="2400" dirty="0" smtClean="0"/>
+              <a:t>) здесь служит универсальным текстовым форматом, который не зависит от языка программирования и платформы: данные представляются в виде структурированных тегов, понятных и человеку, и машине. В XML‑RPC есть строго определённый набор типов, которые </a:t>
+            </a:r>
+            <a:r>
+              <a:rPr lang="ru-RU" sz="2400" dirty="0" err="1" smtClean="0"/>
+              <a:t>маппятся</a:t>
+            </a:r>
+            <a:r>
+              <a:rPr lang="ru-RU" sz="2400" dirty="0" smtClean="0"/>
+              <a:t> на </a:t>
+            </a:r>
+            <a:r>
+              <a:rPr lang="ru-RU" sz="2400" dirty="0" err="1" smtClean="0"/>
+              <a:t>XML‑элементы</a:t>
+            </a:r>
+            <a:r>
+              <a:rPr lang="ru-RU" sz="2400" dirty="0" smtClean="0"/>
+              <a:t>: числа — &lt;</a:t>
+            </a:r>
+            <a:r>
+              <a:rPr lang="ru-RU" sz="2400" dirty="0" err="1" smtClean="0"/>
+              <a:t>int</a:t>
+            </a:r>
+            <a:r>
+              <a:rPr lang="ru-RU" sz="2400" dirty="0" smtClean="0"/>
+              <a:t>&gt;, строки — &lt;</a:t>
+            </a:r>
+            <a:r>
+              <a:rPr lang="ru-RU" sz="2400" dirty="0" err="1" smtClean="0"/>
+              <a:t>string</a:t>
+            </a:r>
+            <a:r>
+              <a:rPr lang="ru-RU" sz="2400" dirty="0" smtClean="0"/>
+              <a:t>&gt;, булевы значения — &lt;</a:t>
+            </a:r>
+            <a:r>
+              <a:rPr lang="ru-RU" sz="2400" dirty="0" err="1" smtClean="0"/>
+              <a:t>boolean</a:t>
+            </a:r>
+            <a:r>
+              <a:rPr lang="ru-RU" sz="2400" dirty="0" smtClean="0"/>
+              <a:t>&gt;, массивы — &lt;</a:t>
+            </a:r>
+            <a:r>
+              <a:rPr lang="ru-RU" sz="2400" dirty="0" err="1" smtClean="0"/>
+              <a:t>array</a:t>
+            </a:r>
+            <a:r>
+              <a:rPr lang="ru-RU" sz="2400" dirty="0" smtClean="0"/>
+              <a:t>&gt;, структуры — &lt;</a:t>
+            </a:r>
+            <a:r>
+              <a:rPr lang="ru-RU" sz="2400" dirty="0" err="1" smtClean="0"/>
+              <a:t>struct</a:t>
+            </a:r>
+            <a:r>
+              <a:rPr lang="ru-RU" sz="2400" dirty="0" smtClean="0"/>
+              <a:t>&gt;. Запрос оформляется как &lt;</a:t>
+            </a:r>
+            <a:r>
+              <a:rPr lang="ru-RU" sz="2400" dirty="0" err="1" smtClean="0"/>
+              <a:t>methodCall</a:t>
+            </a:r>
+            <a:r>
+              <a:rPr lang="ru-RU" sz="2400" dirty="0" smtClean="0"/>
+              <a:t>&gt; с именем метода и параметрами, а ответ — либо как успешный результат в &lt;</a:t>
+            </a:r>
+            <a:r>
+              <a:rPr lang="ru-RU" sz="2400" dirty="0" err="1" smtClean="0"/>
+              <a:t>params</a:t>
+            </a:r>
+            <a:r>
+              <a:rPr lang="ru-RU" sz="2400" dirty="0" smtClean="0"/>
+              <a:t>&gt;, либо как ошибка в &lt;</a:t>
+            </a:r>
+            <a:r>
+              <a:rPr lang="ru-RU" sz="2400" dirty="0" err="1" smtClean="0"/>
+              <a:t>fault</a:t>
+            </a:r>
+            <a:r>
+              <a:rPr lang="ru-RU" sz="2400" dirty="0" smtClean="0"/>
+              <a:t>&gt;. Именно эта стандартизация позволяет разным системам надёжно обмениваться данными, даже если они написаны на разных языках.</a:t>
+            </a:r>
+            <a:endParaRPr lang="ru-RU" sz="2400" dirty="0"/>
+          </a:p>
+        </p:txBody>
+      </p:sp>
+    </p:spTree>
+  </p:cSld>
+  <p:clrMapOvr>
+    <a:masterClrMapping/>
+  </p:clrMapOvr>
+</p:sld>
+</file>
+
+<file path=ppt/slides/slide4.xml><?xml version="1.0" encoding="utf-8"?>
+<p:sld xmlns:a="http://schemas.openxmlformats.org/drawingml/2006/main" xmlns:r="http://schemas.openxmlformats.org/officeDocument/2006/relationships" xmlns:p="http://schemas.openxmlformats.org/presentationml/2006/main">
+  <p:cSld>
+    <p:spTree>
+      <p:nvGrpSpPr>
+        <p:cNvPr id="1" name=""/>
+        <p:cNvGrpSpPr/>
+        <p:nvPr/>
+      </p:nvGrpSpPr>
+      <p:grpSpPr>
+        <a:xfrm>
+          <a:off x="0" y="0"/>
+          <a:ext cx="0" cy="0"/>
+          <a:chOff x="0" y="0"/>
+          <a:chExt cx="0" cy="0"/>
+        </a:xfrm>
+      </p:grpSpPr>
+      <p:sp>
+        <p:nvSpPr>
+          <p:cNvPr id="3" name="Прямоугольник 2"/>
+          <p:cNvSpPr/>
+          <p:nvPr/>
+        </p:nvSpPr>
+        <p:spPr>
+          <a:xfrm>
+            <a:off x="0" y="751344"/>
+            <a:ext cx="9144000" cy="5262979"/>
+          </a:xfrm>
+          <a:prstGeom prst="rect">
+            <a:avLst/>
+          </a:prstGeom>
+        </p:spPr>
+        <p:txBody>
+          <a:bodyPr wrap="square">
+            <a:spAutoFit/>
+          </a:bodyPr>
+          <a:lstStyle/>
+          <a:p>
+            <a:pPr algn="just"/>
+            <a:r>
+              <a:rPr lang="ru-RU" sz="2400" dirty="0" err="1" smtClean="0"/>
+              <a:t>Сериализация</a:t>
+            </a:r>
+            <a:r>
+              <a:rPr lang="ru-RU" sz="2400" dirty="0" smtClean="0"/>
+              <a:t> — это превращение параметров вызова и результата в </a:t>
+            </a:r>
+            <a:r>
+              <a:rPr lang="ru-RU" sz="2400" dirty="0" err="1" smtClean="0"/>
+              <a:t>XML‑представление</a:t>
+            </a:r>
+            <a:r>
+              <a:rPr lang="ru-RU" sz="2400" dirty="0" smtClean="0"/>
+              <a:t>, а </a:t>
+            </a:r>
+            <a:r>
+              <a:rPr lang="ru-RU" sz="2400" dirty="0" err="1" smtClean="0"/>
+              <a:t>десериализация</a:t>
+            </a:r>
+            <a:r>
+              <a:rPr lang="ru-RU" sz="2400" dirty="0" smtClean="0"/>
+              <a:t> — обратный процесс: из </a:t>
+            </a:r>
+            <a:r>
+              <a:rPr lang="ru-RU" sz="2400" dirty="0" err="1" smtClean="0"/>
+              <a:t>XML‑документа</a:t>
+            </a:r>
+            <a:r>
+              <a:rPr lang="ru-RU" sz="2400" dirty="0" smtClean="0"/>
+              <a:t> восстанавливаются типы и значения, понятные программе. В цепочке XML‑RPC это происходит дважды: клиент </a:t>
+            </a:r>
+            <a:r>
+              <a:rPr lang="ru-RU" sz="2400" dirty="0" err="1" smtClean="0"/>
+              <a:t>сериализует</a:t>
+            </a:r>
+            <a:r>
+              <a:rPr lang="ru-RU" sz="2400" dirty="0" smtClean="0"/>
+              <a:t> параметры и отправляет </a:t>
+            </a:r>
+            <a:r>
+              <a:rPr lang="ru-RU" sz="2400" dirty="0" err="1" smtClean="0"/>
+              <a:t>HTTP‑запрос</a:t>
+            </a:r>
+            <a:r>
+              <a:rPr lang="ru-RU" sz="2400" dirty="0" smtClean="0"/>
+              <a:t>, сервер </a:t>
+            </a:r>
+            <a:r>
+              <a:rPr lang="ru-RU" sz="2400" dirty="0" err="1" smtClean="0"/>
+              <a:t>десериализует</a:t>
+            </a:r>
+            <a:r>
+              <a:rPr lang="ru-RU" sz="2400" dirty="0" smtClean="0"/>
+              <a:t>, выполняет функцию, </a:t>
+            </a:r>
+            <a:r>
+              <a:rPr lang="ru-RU" sz="2400" dirty="0" err="1" smtClean="0"/>
+              <a:t>сериализует</a:t>
+            </a:r>
+            <a:r>
+              <a:rPr lang="ru-RU" sz="2400" dirty="0" smtClean="0"/>
+              <a:t> результат и возвращает ответ, который клиент снова </a:t>
+            </a:r>
+            <a:r>
+              <a:rPr lang="ru-RU" sz="2400" dirty="0" err="1" smtClean="0"/>
+              <a:t>десериализует</a:t>
+            </a:r>
+            <a:r>
+              <a:rPr lang="ru-RU" sz="2400" dirty="0" smtClean="0"/>
+              <a:t>. При этом возможны два основных типа ошибок: </a:t>
+            </a:r>
+            <a:r>
+              <a:rPr lang="ru-RU" sz="2400" dirty="0" err="1" smtClean="0"/>
+              <a:t>Fault</a:t>
+            </a:r>
+            <a:r>
+              <a:rPr lang="ru-RU" sz="2400" dirty="0" smtClean="0"/>
+              <a:t> (серверная ошибка, например, неверный формат IP или маски) и </a:t>
+            </a:r>
+            <a:r>
+              <a:rPr lang="ru-RU" sz="2400" dirty="0" err="1" smtClean="0"/>
+              <a:t>ProtocolError</a:t>
+            </a:r>
+            <a:r>
+              <a:rPr lang="ru-RU" sz="2400" dirty="0" smtClean="0"/>
+              <a:t> (транспортная ошибка, например, сервер недоступен). На диаграмме последовательности эти случаи отражают в блоках </a:t>
+            </a:r>
+            <a:r>
+              <a:rPr lang="ru-RU" sz="2400" dirty="0" err="1" smtClean="0"/>
+              <a:t>alt</a:t>
+            </a:r>
+            <a:r>
+              <a:rPr lang="ru-RU" sz="2400" dirty="0" smtClean="0"/>
+              <a:t>: одна ветка — успешный сценарий, другая — обработка ошибки, что делает систему предсказуемой и устойчивой к сбоям.</a:t>
+            </a:r>
+            <a:endParaRPr lang="ru-RU" sz="2400" dirty="0"/>
+          </a:p>
+        </p:txBody>
+      </p:sp>
+    </p:spTree>
+  </p:cSld>
+  <p:clrMapOvr>
+    <a:masterClrMapping/>
+  </p:clrMapOvr>
+</p:sld>
+</file>
+
+<file path=ppt/slides/slide5.xml><?xml version="1.0" encoding="utf-8"?>
+<p:sld xmlns:a="http://schemas.openxmlformats.org/drawingml/2006/main" xmlns:r="http://schemas.openxmlformats.org/officeDocument/2006/relationships" xmlns:p="http://schemas.openxmlformats.org/presentationml/2006/main">
+  <p:cSld>
+    <p:spTree>
+      <p:nvGrpSpPr>
+        <p:cNvPr id="1" name=""/>
+        <p:cNvGrpSpPr/>
+        <p:nvPr/>
+      </p:nvGrpSpPr>
+      <p:grpSpPr>
+        <a:xfrm>
+          <a:off x="0" y="0"/>
+          <a:ext cx="0" cy="0"/>
+          <a:chOff x="0" y="0"/>
+          <a:chExt cx="0" cy="0"/>
+        </a:xfrm>
+      </p:grpSpPr>
+      <p:sp>
+        <p:nvSpPr>
+          <p:cNvPr id="9" name="Прямоугольник 8"/>
+          <p:cNvSpPr/>
+          <p:nvPr/>
+        </p:nvSpPr>
+        <p:spPr>
+          <a:xfrm>
+            <a:off x="1" y="1214422"/>
+            <a:ext cx="9144000" cy="1938992"/>
+          </a:xfrm>
+          <a:prstGeom prst="rect">
+            <a:avLst/>
+          </a:prstGeom>
+        </p:spPr>
+        <p:txBody>
+          <a:bodyPr wrap="square">
+            <a:spAutoFit/>
+          </a:bodyPr>
+          <a:lstStyle/>
+          <a:p>
+            <a:r>
+              <a:rPr lang="en-US" sz="2400" dirty="0" err="1" smtClean="0"/>
+              <a:t>xmlrpc.client</a:t>
+            </a:r>
+            <a:r>
+              <a:rPr lang="en-US" sz="2400" dirty="0" smtClean="0"/>
+              <a:t> — XML-RPC client access</a:t>
+            </a:r>
+          </a:p>
+          <a:p>
+            <a:r>
+              <a:rPr lang="en-US" sz="2400" dirty="0" smtClean="0">
+                <a:hlinkClick r:id="rId2"/>
+              </a:rPr>
+              <a:t>https://docs.python.org/3/library/xmlrpc.client.html#module-xmlrpc.client</a:t>
+            </a:r>
+            <a:endParaRPr lang="ru-RU" sz="2400" dirty="0" smtClean="0"/>
+          </a:p>
+          <a:p>
+            <a:endParaRPr lang="en-US" sz="2400" dirty="0" smtClean="0"/>
+          </a:p>
+          <a:p>
+            <a:endParaRPr lang="en-US" sz="2400" dirty="0"/>
+          </a:p>
+        </p:txBody>
+      </p:sp>
+      <p:sp>
+        <p:nvSpPr>
+          <p:cNvPr id="10" name="Заголовок 1"/>
+          <p:cNvSpPr>
+            <a:spLocks noGrp="1"/>
+          </p:cNvSpPr>
+          <p:nvPr>
+            <p:ph type="title"/>
+          </p:nvPr>
+        </p:nvSpPr>
+        <p:spPr>
+          <a:xfrm>
+            <a:off x="928662" y="-357214"/>
+            <a:ext cx="7772400" cy="1143000"/>
+          </a:xfrm>
+        </p:spPr>
+        <p:txBody>
+          <a:bodyPr/>
+          <a:lstStyle/>
+          <a:p>
+            <a:pPr algn="ctr"/>
+            <a:r>
+              <a:rPr lang="ru-RU" dirty="0" smtClean="0"/>
+              <a:t>Дополнительные ссылки</a:t>
+            </a:r>
+            <a:endParaRPr lang="ru-RU" dirty="0"/>
+          </a:p>
+        </p:txBody>
+      </p:sp>
+      <p:sp>
+        <p:nvSpPr>
+          <p:cNvPr id="4" name="TextBox 3"/>
+          <p:cNvSpPr txBox="1"/>
+          <p:nvPr/>
+        </p:nvSpPr>
+        <p:spPr>
+          <a:xfrm>
+            <a:off x="214282" y="2428868"/>
+            <a:ext cx="4389120" cy="2380139"/>
+          </a:xfrm>
+          <a:prstGeom prst="rect">
+            <a:avLst/>
+          </a:prstGeom>
+          <a:noFill/>
+        </p:spPr>
+        <p:txBody>
+          <a:bodyPr wrap="square">
+            <a:spAutoFit/>
+          </a:bodyPr>
+          <a:lstStyle/>
+          <a:p>
+            <a:pPr>
+              <a:spcAft>
+                <a:spcPts val="200"/>
+              </a:spcAft>
+              <a:defRPr sz="1100">
+                <a:solidFill>
+                  <a:srgbClr val="00D4AA"/>
+                </a:solidFill>
+                <a:latin typeface="Consolas"/>
+              </a:defRPr>
+            </a:pPr>
+            <a:r>
+              <a:rPr>
+                <a:solidFill>
+                  <a:srgbClr val="FF0000"/>
+                </a:solidFill>
+              </a:rPr>
+              <a:t>&lt;?xml version="1.0"?&gt;</a:t>
+            </a:r>
+          </a:p>
+          <a:p>
+            <a:pPr>
+              <a:spcAft>
+                <a:spcPts val="200"/>
+              </a:spcAft>
+              <a:defRPr sz="1100">
+                <a:solidFill>
+                  <a:srgbClr val="00D4AA"/>
+                </a:solidFill>
+                <a:latin typeface="Consolas"/>
+              </a:defRPr>
+            </a:pPr>
+            <a:r>
+              <a:rPr>
+                <a:solidFill>
+                  <a:srgbClr val="FF0000"/>
+                </a:solidFill>
+              </a:rPr>
+              <a:t>&lt;methodCall&gt;</a:t>
+            </a:r>
+          </a:p>
+          <a:p>
+            <a:pPr lvl="1">
+              <a:spcAft>
+                <a:spcPts val="200"/>
+              </a:spcAft>
+              <a:defRPr sz="1100">
+                <a:solidFill>
+                  <a:srgbClr val="00D4AA"/>
+                </a:solidFill>
+                <a:latin typeface="Consolas"/>
+              </a:defRPr>
+            </a:pPr>
+            <a:r>
+              <a:rPr>
+                <a:solidFill>
+                  <a:srgbClr val="FF0000"/>
+                </a:solidFill>
+              </a:rPr>
+              <a:t>&lt;methodName&gt;get_broadcast&lt;/methodName&gt;</a:t>
+            </a:r>
+          </a:p>
+          <a:p>
+            <a:pPr lvl="1">
+              <a:spcAft>
+                <a:spcPts val="200"/>
+              </a:spcAft>
+              <a:defRPr sz="1100">
+                <a:solidFill>
+                  <a:srgbClr val="00D4AA"/>
+                </a:solidFill>
+                <a:latin typeface="Consolas"/>
+              </a:defRPr>
+            </a:pPr>
+            <a:r>
+              <a:rPr>
+                <a:solidFill>
+                  <a:srgbClr val="FF0000"/>
+                </a:solidFill>
+              </a:rPr>
+              <a:t>&lt;params&gt;</a:t>
+            </a:r>
+          </a:p>
+          <a:p>
+            <a:pPr lvl="2">
+              <a:spcAft>
+                <a:spcPts val="200"/>
+              </a:spcAft>
+              <a:defRPr sz="1100">
+                <a:solidFill>
+                  <a:srgbClr val="00D4AA"/>
+                </a:solidFill>
+                <a:latin typeface="Consolas"/>
+              </a:defRPr>
+            </a:pPr>
+            <a:r>
+              <a:rPr>
+                <a:solidFill>
+                  <a:srgbClr val="FF0000"/>
+                </a:solidFill>
+              </a:rPr>
+              <a:t>&lt;param&gt;</a:t>
+            </a:r>
+          </a:p>
+          <a:p>
+            <a:pPr lvl="3">
+              <a:spcAft>
+                <a:spcPts val="200"/>
+              </a:spcAft>
+              <a:defRPr sz="1100">
+                <a:solidFill>
+                  <a:srgbClr val="00D4AA"/>
+                </a:solidFill>
+                <a:latin typeface="Consolas"/>
+              </a:defRPr>
+            </a:pPr>
+            <a:r>
+              <a:rPr>
+                <a:solidFill>
+                  <a:srgbClr val="FF0000"/>
+                </a:solidFill>
+              </a:rPr>
+              <a:t>&lt;value&gt;&lt;string&gt;192.168.1.10&lt;/string&gt;&lt;/value&gt;</a:t>
+            </a:r>
+          </a:p>
+          <a:p>
+            <a:pPr lvl="3">
+              <a:spcAft>
+                <a:spcPts val="200"/>
+              </a:spcAft>
+              <a:defRPr sz="1100">
+                <a:solidFill>
+                  <a:srgbClr val="00D4AA"/>
+                </a:solidFill>
+                <a:latin typeface="Consolas"/>
+              </a:defRPr>
+            </a:pPr>
+            <a:r>
+              <a:rPr>
+                <a:solidFill>
+                  <a:srgbClr val="FF0000"/>
+                </a:solidFill>
+              </a:rPr>
+              <a:t>&lt;value&gt;&lt;int&gt;24&lt;/int&gt;&lt;/value&gt;</a:t>
+            </a:r>
+          </a:p>
+          <a:p>
+            <a:pPr lvl="2">
+              <a:spcAft>
+                <a:spcPts val="200"/>
+              </a:spcAft>
+              <a:defRPr sz="1100">
+                <a:solidFill>
+                  <a:srgbClr val="00D4AA"/>
+                </a:solidFill>
+                <a:latin typeface="Consolas"/>
+              </a:defRPr>
+            </a:pPr>
+            <a:r>
+              <a:rPr>
+                <a:solidFill>
+                  <a:srgbClr val="FF0000"/>
+                </a:solidFill>
+              </a:rPr>
+              <a:t>&lt;/param&gt;</a:t>
+            </a:r>
+          </a:p>
+          <a:p>
+            <a:pPr lvl="1">
+              <a:spcAft>
+                <a:spcPts val="200"/>
+              </a:spcAft>
+              <a:defRPr sz="1100">
+                <a:solidFill>
+                  <a:srgbClr val="00D4AA"/>
+                </a:solidFill>
+                <a:latin typeface="Consolas"/>
+              </a:defRPr>
+            </a:pPr>
+            <a:r>
+              <a:rPr>
+                <a:solidFill>
+                  <a:srgbClr val="FF0000"/>
+                </a:solidFill>
+              </a:rPr>
+              <a:t>&lt;/params&gt;</a:t>
+            </a:r>
+          </a:p>
+          <a:p>
+            <a:pPr>
+              <a:spcAft>
+                <a:spcPts val="200"/>
+              </a:spcAft>
+              <a:defRPr sz="1100">
+                <a:solidFill>
+                  <a:srgbClr val="00D4AA"/>
+                </a:solidFill>
+                <a:latin typeface="Consolas"/>
+              </a:defRPr>
+            </a:pPr>
+            <a:r>
+              <a:rPr>
+                <a:solidFill>
+                  <a:srgbClr val="FF0000"/>
+                </a:solidFill>
+              </a:rPr>
+              <a:t>&lt;/methodCall&gt;</a:t>
+            </a:r>
+          </a:p>
+          <a:p>
+            <a:pPr>
+              <a:defRPr sz="1100" i="1">
+                <a:solidFill>
+                  <a:srgbClr val="C8C8E0"/>
+                </a:solidFill>
+                <a:latin typeface="Segoe UI"/>
+              </a:defRPr>
+            </a:pPr>
+            <a:r>
+              <a:rPr>
+                <a:solidFill>
+                  <a:srgbClr val="FF0000"/>
+                </a:solidFill>
+              </a:rPr>
+              <a:t>Пример XML-RPC запроса</a:t>
+            </a:r>
+          </a:p>
+        </p:txBody>
+      </p:sp>
+      <p:sp>
+        <p:nvSpPr>
+          <p:cNvPr id="5" name="TextBox 4"/>
+          <p:cNvSpPr txBox="1"/>
+          <p:nvPr/>
+        </p:nvSpPr>
+        <p:spPr>
+          <a:xfrm>
+            <a:off x="4937760" y="2000240"/>
+            <a:ext cx="4206240" cy="3134191"/>
+          </a:xfrm>
+          <a:prstGeom prst="rect">
+            <a:avLst/>
+          </a:prstGeom>
+          <a:noFill/>
+        </p:spPr>
+        <p:txBody>
+          <a:bodyPr wrap="square">
+            <a:spAutoFit/>
+          </a:bodyPr>
+          <a:lstStyle/>
+          <a:p>
+            <a:pPr>
+              <a:spcAft>
+                <a:spcPts val="200"/>
+              </a:spcAft>
+              <a:defRPr sz="1100">
+                <a:solidFill>
+                  <a:srgbClr val="00D4AA"/>
+                </a:solidFill>
+                <a:latin typeface="Consolas"/>
+              </a:defRPr>
+            </a:pPr>
+            <a:r>
+              <a:rPr>
+                <a:solidFill>
+                  <a:srgbClr val="FF0000"/>
+                </a:solidFill>
+              </a:rPr>
+              <a:t>&lt;methodResponse&gt;</a:t>
+            </a:r>
+          </a:p>
+          <a:p>
+            <a:pPr lvl="1">
+              <a:spcAft>
+                <a:spcPts val="200"/>
+              </a:spcAft>
+              <a:defRPr sz="1100">
+                <a:solidFill>
+                  <a:srgbClr val="00D4AA"/>
+                </a:solidFill>
+                <a:latin typeface="Consolas"/>
+              </a:defRPr>
+            </a:pPr>
+            <a:r>
+              <a:rPr>
+                <a:solidFill>
+                  <a:srgbClr val="FF0000"/>
+                </a:solidFill>
+              </a:rPr>
+              <a:t>&lt;params&gt;</a:t>
+            </a:r>
+          </a:p>
+          <a:p>
+            <a:pPr lvl="2">
+              <a:spcAft>
+                <a:spcPts val="200"/>
+              </a:spcAft>
+              <a:defRPr sz="1100">
+                <a:solidFill>
+                  <a:srgbClr val="00D4AA"/>
+                </a:solidFill>
+                <a:latin typeface="Consolas"/>
+              </a:defRPr>
+            </a:pPr>
+            <a:r>
+              <a:rPr>
+                <a:solidFill>
+                  <a:srgbClr val="FF0000"/>
+                </a:solidFill>
+              </a:rPr>
+              <a:t>&lt;param&gt;</a:t>
+            </a:r>
+          </a:p>
+          <a:p>
+            <a:pPr lvl="3">
+              <a:spcAft>
+                <a:spcPts val="200"/>
+              </a:spcAft>
+              <a:defRPr sz="1100">
+                <a:solidFill>
+                  <a:srgbClr val="00D4AA"/>
+                </a:solidFill>
+                <a:latin typeface="Consolas"/>
+              </a:defRPr>
+            </a:pPr>
+            <a:r>
+              <a:rPr>
+                <a:solidFill>
+                  <a:srgbClr val="FF0000"/>
+                </a:solidFill>
+              </a:rPr>
+              <a:t>&lt;value&gt;</a:t>
+            </a:r>
+          </a:p>
+          <a:p>
+            <a:pPr lvl="4">
+              <a:spcAft>
+                <a:spcPts val="200"/>
+              </a:spcAft>
+              <a:defRPr sz="1100">
+                <a:solidFill>
+                  <a:srgbClr val="00D4AA"/>
+                </a:solidFill>
+                <a:latin typeface="Consolas"/>
+              </a:defRPr>
+            </a:pPr>
+            <a:r>
+              <a:rPr>
+                <a:solidFill>
+                  <a:srgbClr val="FF0000"/>
+                </a:solidFill>
+              </a:rPr>
+              <a:t>&lt;array&gt;&lt;data&gt;</a:t>
+            </a:r>
+          </a:p>
+          <a:p>
+            <a:pPr lvl="5">
+              <a:spcAft>
+                <a:spcPts val="200"/>
+              </a:spcAft>
+              <a:defRPr sz="1100">
+                <a:solidFill>
+                  <a:srgbClr val="00D4AA"/>
+                </a:solidFill>
+                <a:latin typeface="Consolas"/>
+              </a:defRPr>
+            </a:pPr>
+            <a:r>
+              <a:rPr>
+                <a:solidFill>
+                  <a:srgbClr val="FF0000"/>
+                </a:solidFill>
+              </a:rPr>
+              <a:t>&lt;value&gt;&lt;string&gt;192.168.1.1&lt;/string&gt;</a:t>
+            </a:r>
+          </a:p>
+          <a:p>
+            <a:pPr lvl="5">
+              <a:spcAft>
+                <a:spcPts val="200"/>
+              </a:spcAft>
+              <a:defRPr sz="1100">
+                <a:solidFill>
+                  <a:srgbClr val="00D4AA"/>
+                </a:solidFill>
+                <a:latin typeface="Consolas"/>
+              </a:defRPr>
+            </a:pPr>
+            <a:r>
+              <a:rPr>
+                <a:solidFill>
+                  <a:srgbClr val="FF0000"/>
+                </a:solidFill>
+              </a:rPr>
+              <a:t>&lt;value&gt;&lt;string&gt;192.168.1.2&lt;/string&gt;</a:t>
+            </a:r>
+          </a:p>
+          <a:p>
+            <a:pPr lvl="5">
+              <a:spcAft>
+                <a:spcPts val="200"/>
+              </a:spcAft>
+              <a:defRPr sz="1100">
+                <a:solidFill>
+                  <a:srgbClr val="00D4AA"/>
+                </a:solidFill>
+                <a:latin typeface="Consolas"/>
+              </a:defRPr>
+            </a:pPr>
+            <a:r>
+              <a:rPr>
+                <a:solidFill>
+                  <a:srgbClr val="FF0000"/>
+                </a:solidFill>
+              </a:rPr>
+              <a:t>  ...  </a:t>
+            </a:r>
+          </a:p>
+          <a:p>
+            <a:pPr lvl="4">
+              <a:spcAft>
+                <a:spcPts val="200"/>
+              </a:spcAft>
+              <a:defRPr sz="1100">
+                <a:solidFill>
+                  <a:srgbClr val="00D4AA"/>
+                </a:solidFill>
+                <a:latin typeface="Consolas"/>
+              </a:defRPr>
+            </a:pPr>
+            <a:r>
+              <a:rPr>
+                <a:solidFill>
+                  <a:srgbClr val="FF0000"/>
+                </a:solidFill>
+              </a:rPr>
+              <a:t>&lt;/data&gt;&lt;/array&gt;</a:t>
+            </a:r>
+          </a:p>
+          <a:p>
+            <a:pPr lvl="3">
+              <a:spcAft>
+                <a:spcPts val="200"/>
+              </a:spcAft>
+              <a:defRPr sz="1100">
+                <a:solidFill>
+                  <a:srgbClr val="00D4AA"/>
+                </a:solidFill>
+                <a:latin typeface="Consolas"/>
+              </a:defRPr>
+            </a:pPr>
+            <a:r>
+              <a:rPr>
+                <a:solidFill>
+                  <a:srgbClr val="FF0000"/>
+                </a:solidFill>
+              </a:rPr>
+              <a:t>&lt;/value&gt;</a:t>
+            </a:r>
+          </a:p>
+          <a:p>
+            <a:pPr lvl="2">
+              <a:spcAft>
+                <a:spcPts val="200"/>
+              </a:spcAft>
+              <a:defRPr sz="1100">
+                <a:solidFill>
+                  <a:srgbClr val="00D4AA"/>
+                </a:solidFill>
+                <a:latin typeface="Consolas"/>
+              </a:defRPr>
+            </a:pPr>
+            <a:r>
+              <a:rPr>
+                <a:solidFill>
+                  <a:srgbClr val="FF0000"/>
+                </a:solidFill>
+              </a:rPr>
+              <a:t>&lt;/param&gt;</a:t>
+            </a:r>
+          </a:p>
+          <a:p>
+            <a:pPr lvl="1">
+              <a:spcAft>
+                <a:spcPts val="200"/>
+              </a:spcAft>
+              <a:defRPr sz="1100">
+                <a:solidFill>
+                  <a:srgbClr val="00D4AA"/>
+                </a:solidFill>
+                <a:latin typeface="Consolas"/>
+              </a:defRPr>
+            </a:pPr>
+            <a:r>
+              <a:rPr>
+                <a:solidFill>
+                  <a:srgbClr val="FF0000"/>
+                </a:solidFill>
+              </a:rPr>
+              <a:t>&lt;/params&gt;</a:t>
+            </a:r>
+          </a:p>
+          <a:p>
+            <a:pPr>
+              <a:spcAft>
+                <a:spcPts val="200"/>
+              </a:spcAft>
+              <a:defRPr sz="1100">
+                <a:solidFill>
+                  <a:srgbClr val="00D4AA"/>
+                </a:solidFill>
+                <a:latin typeface="Consolas"/>
+              </a:defRPr>
+            </a:pPr>
+            <a:r>
+              <a:rPr>
+                <a:solidFill>
+                  <a:srgbClr val="FF0000"/>
+                </a:solidFill>
+              </a:rPr>
+              <a:t>&lt;/methodResponse&gt;</a:t>
+            </a:r>
+          </a:p>
+          <a:p>
+            <a:pPr>
+              <a:defRPr sz="1100" i="1">
+                <a:solidFill>
+                  <a:srgbClr val="C8C8E0"/>
+                </a:solidFill>
+                <a:latin typeface="Segoe UI"/>
+              </a:defRPr>
+            </a:pPr>
+            <a:r>
+              <a:rPr>
+                <a:solidFill>
+                  <a:srgbClr val="FF0000"/>
+                </a:solidFill>
+              </a:rPr>
+              <a:t>Пример XML-RPC ответа (массив хостов)</a:t>
+            </a:r>
+          </a:p>
+        </p:txBody>
+      </p:sp>
+    </p:spTree>
+  </p:cSld>
+  <p:clrMapOvr>
+    <a:masterClrMapping/>
+  </p:clrMapOvr>
+</p:sld>
+</file>
+
+<file path=ppt/slides/slide6.xml><?xml version="1.0" encoding="utf-8"?>
+<p:sld xmlns:a="http://schemas.openxmlformats.org/drawingml/2006/main" xmlns:r="http://schemas.openxmlformats.org/officeDocument/2006/relationships" xmlns:p="http://schemas.openxmlformats.org/presentationml/2006/main">
+  <p:cSld>
+    <p:spTree>
+      <p:nvGrpSpPr>
+        <p:cNvPr id="1" name=""/>
+        <p:cNvGrpSpPr/>
+        <p:nvPr/>
+      </p:nvGrpSpPr>
+      <p:grpSpPr>
+        <a:xfrm>
+          <a:off x="0" y="0"/>
+          <a:ext cx="0" cy="0"/>
+          <a:chOff x="0" y="0"/>
+          <a:chExt cx="0" cy="0"/>
+        </a:xfrm>
+      </p:grpSpPr>
+      <p:sp>
+        <p:nvSpPr>
           <p:cNvPr id="2" name="Заголовок 1"/>
           <p:cNvSpPr>
             <a:spLocks noGrp="1"/>
@@ -4077,6 +5181,487 @@
           </a:fontRef>
         </p:style>
       </p:cxnSp>
+    </p:spTree>
+  </p:cSld>
+  <p:clrMapOvr>
+    <a:masterClrMapping/>
+  </p:clrMapOvr>
+</p:sld>
+</file>
+
+<file path=ppt/slides/slide7.xml><?xml version="1.0" encoding="utf-8"?>
+<p:sld xmlns:a="http://schemas.openxmlformats.org/drawingml/2006/main" xmlns:r="http://schemas.openxmlformats.org/officeDocument/2006/relationships" xmlns:p="http://schemas.openxmlformats.org/presentationml/2006/main">
+  <p:cSld>
+    <p:spTree>
+      <p:nvGrpSpPr>
+        <p:cNvPr id="1" name=""/>
+        <p:cNvGrpSpPr/>
+        <p:nvPr/>
+      </p:nvGrpSpPr>
+      <p:grpSpPr>
+        <a:xfrm>
+          <a:off x="0" y="0"/>
+          <a:ext cx="0" cy="0"/>
+          <a:chOff x="0" y="0"/>
+          <a:chExt cx="0" cy="0"/>
+        </a:xfrm>
+      </p:grpSpPr>
+      <p:sp>
+        <p:nvSpPr>
+          <p:cNvPr id="3" name="Прямоугольник 2"/>
+          <p:cNvSpPr/>
+          <p:nvPr/>
+        </p:nvSpPr>
+        <p:spPr>
+          <a:xfrm>
+            <a:off x="0" y="751344"/>
+            <a:ext cx="9144000" cy="5632311"/>
+          </a:xfrm>
+          <a:prstGeom prst="rect">
+            <a:avLst/>
+          </a:prstGeom>
+        </p:spPr>
+        <p:txBody>
+          <a:bodyPr wrap="square">
+            <a:spAutoFit/>
+          </a:bodyPr>
+          <a:lstStyle/>
+          <a:p>
+            <a:pPr algn="just"/>
+            <a:r>
+              <a:rPr lang="ru-RU" sz="2400" dirty="0" smtClean="0"/>
+              <a:t>JSON-RPC 2.0 — это протокол удалённого вызова процедур, использующий JSON в качестве формата обмена данными вместо XML. В отличие от XML-RPC, он компактнее, быстрее </a:t>
+            </a:r>
+            <a:r>
+              <a:rPr lang="ru-RU" sz="2400" dirty="0" err="1" smtClean="0"/>
+              <a:t>парсится</a:t>
+            </a:r>
+            <a:r>
+              <a:rPr lang="ru-RU" sz="2400" dirty="0" smtClean="0"/>
+              <a:t> и органичнее ложится на современные </a:t>
+            </a:r>
+            <a:r>
+              <a:rPr lang="ru-RU" sz="2400" dirty="0" err="1" smtClean="0"/>
+              <a:t>веб-стеки</a:t>
+            </a:r>
+            <a:r>
+              <a:rPr lang="ru-RU" sz="2400" dirty="0" smtClean="0"/>
+              <a:t>. Спецификация строго определяет структуру запроса и ответа через несколько ключевых полей: </a:t>
+            </a:r>
+            <a:r>
+              <a:rPr lang="ru-RU" sz="2400" dirty="0" err="1" smtClean="0"/>
+              <a:t>jsonrpc</a:t>
+            </a:r>
+            <a:r>
+              <a:rPr lang="ru-RU" sz="2400" dirty="0" smtClean="0"/>
+              <a:t> — версия протокола (всегда "2.0"), </a:t>
+            </a:r>
+            <a:r>
+              <a:rPr lang="ru-RU" sz="2400" dirty="0" err="1" smtClean="0"/>
+              <a:t>method</a:t>
+            </a:r>
+            <a:r>
+              <a:rPr lang="ru-RU" sz="2400" dirty="0" smtClean="0"/>
+              <a:t> — имя вызываемого метода, </a:t>
+            </a:r>
+            <a:r>
+              <a:rPr lang="ru-RU" sz="2400" dirty="0" err="1" smtClean="0"/>
+              <a:t>params</a:t>
+            </a:r>
+            <a:r>
+              <a:rPr lang="ru-RU" sz="2400" dirty="0" smtClean="0"/>
+              <a:t> — параметры (могут быть массивом или объектом), </a:t>
+            </a:r>
+            <a:r>
+              <a:rPr lang="ru-RU" sz="2400" dirty="0" err="1" smtClean="0"/>
+              <a:t>id</a:t>
+            </a:r>
+            <a:r>
+              <a:rPr lang="ru-RU" sz="2400" dirty="0" smtClean="0"/>
+              <a:t> — уникальный идентификатор запроса для сопоставления ответа с запросом. Ответ содержит </a:t>
+            </a:r>
+            <a:r>
+              <a:rPr lang="ru-RU" sz="2400" dirty="0" err="1" smtClean="0"/>
+              <a:t>result</a:t>
+            </a:r>
+            <a:r>
+              <a:rPr lang="ru-RU" sz="2400" dirty="0" smtClean="0"/>
+              <a:t> при успехе либо </a:t>
+            </a:r>
+            <a:r>
+              <a:rPr lang="ru-RU" sz="2400" dirty="0" err="1" smtClean="0"/>
+              <a:t>error</a:t>
+            </a:r>
+            <a:r>
+              <a:rPr lang="ru-RU" sz="2400" dirty="0" smtClean="0"/>
+              <a:t> при неудаче (с кодом и сообщением), а также тот же </a:t>
+            </a:r>
+            <a:r>
+              <a:rPr lang="ru-RU" sz="2400" dirty="0" err="1" smtClean="0"/>
+              <a:t>id</a:t>
+            </a:r>
+            <a:r>
+              <a:rPr lang="ru-RU" sz="2400" dirty="0" smtClean="0"/>
+              <a:t>, что и в запросе. Если </a:t>
+            </a:r>
+            <a:r>
+              <a:rPr lang="ru-RU" sz="2400" dirty="0" err="1" smtClean="0"/>
+              <a:t>id</a:t>
+            </a:r>
+            <a:r>
+              <a:rPr lang="ru-RU" sz="2400" dirty="0" smtClean="0"/>
+              <a:t> отсутствует — это уведомление (</a:t>
+            </a:r>
+            <a:r>
+              <a:rPr lang="ru-RU" sz="2400" dirty="0" err="1" smtClean="0"/>
+              <a:t>notification</a:t>
+            </a:r>
+            <a:r>
+              <a:rPr lang="ru-RU" sz="2400" dirty="0" smtClean="0"/>
+              <a:t>), на которое сервер не отвечает. Запросы можно отправлять пакетом (</a:t>
+            </a:r>
+            <a:r>
+              <a:rPr lang="ru-RU" sz="2400" dirty="0" err="1" smtClean="0"/>
+              <a:t>batch</a:t>
+            </a:r>
+            <a:r>
+              <a:rPr lang="ru-RU" sz="2400" dirty="0" smtClean="0"/>
+              <a:t>) — массивом в одном HTTP-вызове, что снижает накладные расходы на транспорт.</a:t>
+            </a:r>
+            <a:endParaRPr lang="ru-RU" sz="2400" dirty="0"/>
+          </a:p>
+        </p:txBody>
+      </p:sp>
+    </p:spTree>
+  </p:cSld>
+  <p:clrMapOvr>
+    <a:masterClrMapping/>
+  </p:clrMapOvr>
+</p:sld>
+</file>
+
+<file path=ppt/slides/slide8.xml><?xml version="1.0" encoding="utf-8"?>
+<p:sld xmlns:a="http://schemas.openxmlformats.org/drawingml/2006/main" xmlns:r="http://schemas.openxmlformats.org/officeDocument/2006/relationships" xmlns:p="http://schemas.openxmlformats.org/presentationml/2006/main">
+  <p:cSld>
+    <p:spTree>
+      <p:nvGrpSpPr>
+        <p:cNvPr id="1" name=""/>
+        <p:cNvGrpSpPr/>
+        <p:nvPr/>
+      </p:nvGrpSpPr>
+      <p:grpSpPr>
+        <a:xfrm>
+          <a:off x="0" y="0"/>
+          <a:ext cx="0" cy="0"/>
+          <a:chOff x="0" y="0"/>
+          <a:chExt cx="0" cy="0"/>
+        </a:xfrm>
+      </p:grpSpPr>
+      <p:sp>
+        <p:nvSpPr>
+          <p:cNvPr id="3" name="Прямоугольник 2"/>
+          <p:cNvSpPr/>
+          <p:nvPr/>
+        </p:nvSpPr>
+        <p:spPr>
+          <a:xfrm>
+            <a:off x="0" y="751344"/>
+            <a:ext cx="9144000" cy="5509200"/>
+          </a:xfrm>
+          <a:prstGeom prst="rect">
+            <a:avLst/>
+          </a:prstGeom>
+        </p:spPr>
+        <p:txBody>
+          <a:bodyPr wrap="square">
+            <a:spAutoFit/>
+          </a:bodyPr>
+          <a:lstStyle/>
+          <a:p>
+            <a:pPr algn="just"/>
+            <a:r>
+              <a:rPr lang="ru-RU" sz="2200" dirty="0" err="1" smtClean="0"/>
+              <a:t>Flask</a:t>
+            </a:r>
+            <a:r>
+              <a:rPr lang="ru-RU" sz="2200" dirty="0" smtClean="0"/>
+              <a:t> подходит для реализации JSON-RPC-сервера благодаря лёгкости маршрутизации и встроенной поддержке JSON: достаточно создать один </a:t>
+            </a:r>
+            <a:r>
+              <a:rPr lang="ru-RU" sz="2200" dirty="0" err="1" smtClean="0"/>
+              <a:t>POST-эндпоинт</a:t>
+            </a:r>
+            <a:r>
+              <a:rPr lang="ru-RU" sz="2200" dirty="0" smtClean="0"/>
+              <a:t>, который принимает тело запроса, разбирает JSON, определяет метод по полю </a:t>
+            </a:r>
+            <a:r>
+              <a:rPr lang="ru-RU" sz="2200" dirty="0" err="1" smtClean="0"/>
+              <a:t>method</a:t>
+            </a:r>
+            <a:r>
+              <a:rPr lang="ru-RU" sz="2200" dirty="0" smtClean="0"/>
+              <a:t> и вызывает соответствующую функцию. Важно, что сервер возвращает строго структурированный ответ: при успехе — {"</a:t>
+            </a:r>
+            <a:r>
+              <a:rPr lang="ru-RU" sz="2200" dirty="0" err="1" smtClean="0"/>
+              <a:t>jsonrpc</a:t>
+            </a:r>
+            <a:r>
+              <a:rPr lang="ru-RU" sz="2200" dirty="0" smtClean="0"/>
+              <a:t>":"2.0","</a:t>
+            </a:r>
+            <a:r>
+              <a:rPr lang="ru-RU" sz="2200" dirty="0" err="1" smtClean="0"/>
+              <a:t>result</a:t>
+            </a:r>
+            <a:r>
+              <a:rPr lang="ru-RU" sz="2200" dirty="0" smtClean="0"/>
+              <a:t>":&lt;значение&gt;,"</a:t>
+            </a:r>
+            <a:r>
+              <a:rPr lang="ru-RU" sz="2200" dirty="0" err="1" smtClean="0"/>
+              <a:t>id</a:t>
+            </a:r>
+            <a:r>
+              <a:rPr lang="ru-RU" sz="2200" dirty="0" smtClean="0"/>
+              <a:t>":&lt;</a:t>
+            </a:r>
+            <a:r>
+              <a:rPr lang="ru-RU" sz="2200" dirty="0" err="1" smtClean="0"/>
+              <a:t>id</a:t>
+            </a:r>
+            <a:r>
+              <a:rPr lang="ru-RU" sz="2200" dirty="0" smtClean="0"/>
+              <a:t>&gt;}, при ошибке — {"</a:t>
+            </a:r>
+            <a:r>
+              <a:rPr lang="ru-RU" sz="2200" dirty="0" err="1" smtClean="0"/>
+              <a:t>jsonrpc</a:t>
+            </a:r>
+            <a:r>
+              <a:rPr lang="ru-RU" sz="2200" dirty="0" smtClean="0"/>
+              <a:t>":"2.0","</a:t>
+            </a:r>
+            <a:r>
+              <a:rPr lang="ru-RU" sz="2200" dirty="0" err="1" smtClean="0"/>
+              <a:t>error</a:t>
+            </a:r>
+            <a:r>
+              <a:rPr lang="ru-RU" sz="2200" dirty="0" smtClean="0"/>
+              <a:t>":{"</a:t>
+            </a:r>
+            <a:r>
+              <a:rPr lang="ru-RU" sz="2200" dirty="0" err="1" smtClean="0"/>
+              <a:t>code</a:t>
+            </a:r>
+            <a:r>
+              <a:rPr lang="ru-RU" sz="2200" dirty="0" smtClean="0"/>
+              <a:t>":&lt;код&gt;,"</a:t>
+            </a:r>
+            <a:r>
+              <a:rPr lang="ru-RU" sz="2200" dirty="0" err="1" smtClean="0"/>
+              <a:t>message</a:t>
+            </a:r>
+            <a:r>
+              <a:rPr lang="ru-RU" sz="2200" dirty="0" smtClean="0"/>
+              <a:t>":&lt;сообщение&gt;},"</a:t>
+            </a:r>
+            <a:r>
+              <a:rPr lang="ru-RU" sz="2200" dirty="0" err="1" smtClean="0"/>
+              <a:t>id</a:t>
+            </a:r>
+            <a:r>
+              <a:rPr lang="ru-RU" sz="2200" dirty="0" smtClean="0"/>
+              <a:t>":&lt;</a:t>
+            </a:r>
+            <a:r>
+              <a:rPr lang="ru-RU" sz="2200" dirty="0" err="1" smtClean="0"/>
+              <a:t>id</a:t>
+            </a:r>
+            <a:r>
+              <a:rPr lang="ru-RU" sz="2200" dirty="0" smtClean="0"/>
+              <a:t>&gt;}. Спецификация определяет стандартные коды ошибок: -32700 (ошибка </a:t>
+            </a:r>
+            <a:r>
+              <a:rPr lang="ru-RU" sz="2200" dirty="0" err="1" smtClean="0"/>
+              <a:t>парсинга</a:t>
+            </a:r>
+            <a:r>
+              <a:rPr lang="ru-RU" sz="2200" dirty="0" smtClean="0"/>
+              <a:t> JSON), -32600 (</a:t>
+            </a:r>
+            <a:r>
+              <a:rPr lang="ru-RU" sz="2200" dirty="0" err="1" smtClean="0"/>
+              <a:t>невалидный</a:t>
+            </a:r>
+            <a:r>
+              <a:rPr lang="ru-RU" sz="2200" dirty="0" smtClean="0"/>
+              <a:t> запрос), -32601 (метод не найден), -32602 (неверные параметры), -32603 (внутренняя ошибка). Клиент на </a:t>
+            </a:r>
+            <a:r>
+              <a:rPr lang="ru-RU" sz="2200" dirty="0" err="1" smtClean="0"/>
+              <a:t>Python</a:t>
+            </a:r>
+            <a:r>
+              <a:rPr lang="ru-RU" sz="2200" dirty="0" smtClean="0"/>
+              <a:t> формирует запросы через </a:t>
+            </a:r>
+            <a:r>
+              <a:rPr lang="ru-RU" sz="2200" dirty="0" err="1" smtClean="0"/>
+              <a:t>requests</a:t>
+            </a:r>
+            <a:r>
+              <a:rPr lang="ru-RU" sz="2200" dirty="0" smtClean="0"/>
+              <a:t> или </a:t>
+            </a:r>
+            <a:r>
+              <a:rPr lang="ru-RU" sz="2200" dirty="0" err="1" smtClean="0"/>
+              <a:t>http.client</a:t>
+            </a:r>
+            <a:r>
+              <a:rPr lang="ru-RU" sz="2200" dirty="0" smtClean="0"/>
+              <a:t>, отправляет их на </a:t>
+            </a:r>
+            <a:r>
+              <a:rPr lang="ru-RU" sz="2200" dirty="0" err="1" smtClean="0"/>
+              <a:t>эндпоинт</a:t>
+            </a:r>
+            <a:r>
+              <a:rPr lang="ru-RU" sz="2200" dirty="0" smtClean="0"/>
+              <a:t> сервера, проверяет наличие </a:t>
+            </a:r>
+            <a:r>
+              <a:rPr lang="ru-RU" sz="2200" dirty="0" err="1" smtClean="0"/>
+              <a:t>result</a:t>
+            </a:r>
+            <a:r>
+              <a:rPr lang="ru-RU" sz="2200" dirty="0" smtClean="0"/>
+              <a:t> или </a:t>
+            </a:r>
+            <a:r>
+              <a:rPr lang="ru-RU" sz="2200" dirty="0" err="1" smtClean="0"/>
+              <a:t>error</a:t>
+            </a:r>
+            <a:r>
+              <a:rPr lang="ru-RU" sz="2200" dirty="0" smtClean="0"/>
+              <a:t> в ответе и выводит результаты в таблицу, что наглядно демонстрирует корректность обработки как успешных, так и ошибочных сценариев.</a:t>
+            </a:r>
+            <a:endParaRPr lang="ru-RU" sz="2200" dirty="0"/>
+          </a:p>
+        </p:txBody>
+      </p:sp>
+    </p:spTree>
+  </p:cSld>
+  <p:clrMapOvr>
+    <a:masterClrMapping/>
+  </p:clrMapOvr>
+</p:sld>
+</file>
+
+<file path=ppt/slides/slide9.xml><?xml version="1.0" encoding="utf-8"?>
+<p:sld xmlns:a="http://schemas.openxmlformats.org/drawingml/2006/main" xmlns:r="http://schemas.openxmlformats.org/officeDocument/2006/relationships" xmlns:p="http://schemas.openxmlformats.org/presentationml/2006/main">
+  <p:cSld>
+    <p:spTree>
+      <p:nvGrpSpPr>
+        <p:cNvPr id="1" name=""/>
+        <p:cNvGrpSpPr/>
+        <p:nvPr/>
+      </p:nvGrpSpPr>
+      <p:grpSpPr>
+        <a:xfrm>
+          <a:off x="0" y="0"/>
+          <a:ext cx="0" cy="0"/>
+          <a:chOff x="0" y="0"/>
+          <a:chExt cx="0" cy="0"/>
+        </a:xfrm>
+      </p:grpSpPr>
+      <p:sp>
+        <p:nvSpPr>
+          <p:cNvPr id="3" name="Прямоугольник 2"/>
+          <p:cNvSpPr/>
+          <p:nvPr/>
+        </p:nvSpPr>
+        <p:spPr>
+          <a:xfrm>
+            <a:off x="0" y="751344"/>
+            <a:ext cx="9144000" cy="5847755"/>
+          </a:xfrm>
+          <a:prstGeom prst="rect">
+            <a:avLst/>
+          </a:prstGeom>
+        </p:spPr>
+        <p:txBody>
+          <a:bodyPr wrap="square">
+            <a:spAutoFit/>
+          </a:bodyPr>
+          <a:lstStyle/>
+          <a:p>
+            <a:pPr algn="just"/>
+            <a:r>
+              <a:rPr lang="ru-RU" sz="2200" dirty="0" smtClean="0"/>
+              <a:t>JSON-RPC и REST решают похожие задачи, но с разными акцентами: REST ориентирован на ресурсы (CRUD-операции через HTTP-глаголы, где URL определяет сущность, а метод — действие), тогда как JSON-RPC ориентирован на действия (вызов удалённой процедуры с параметрами, аналогично локальной функции). REST использует семантику HTTP (статусы 200, 404, 500), а JSON-RPC унифицирует ошибки внутри тела ответа через поле </a:t>
+            </a:r>
+            <a:r>
+              <a:rPr lang="ru-RU" sz="2200" dirty="0" err="1" smtClean="0"/>
+              <a:t>error</a:t>
+            </a:r>
+            <a:r>
+              <a:rPr lang="ru-RU" sz="2200" dirty="0" smtClean="0"/>
+              <a:t>, не полагаясь на HTTP-коды. С точки зрения </a:t>
+            </a:r>
+            <a:r>
+              <a:rPr lang="ru-RU" sz="2200" dirty="0" err="1" smtClean="0"/>
+              <a:t>распределённости</a:t>
+            </a:r>
+            <a:r>
+              <a:rPr lang="ru-RU" sz="2200" dirty="0" smtClean="0"/>
+              <a:t>: каждый RPC-вызов — это обращение к удалённому процессу, что делает </a:t>
+            </a:r>
+            <a:r>
+              <a:rPr lang="ru-RU" sz="2200" dirty="0" err="1" smtClean="0"/>
+              <a:t>распределённость</a:t>
+            </a:r>
+            <a:r>
+              <a:rPr lang="ru-RU" sz="2200" dirty="0" smtClean="0"/>
+              <a:t> явной — клиент не знает, где физически выполняется функция. Масштабировать JSON-RPC-сервис можно горизонтально (запуск нескольких </a:t>
+            </a:r>
+            <a:r>
+              <a:rPr lang="ru-RU" sz="2200" dirty="0" err="1" smtClean="0"/>
+              <a:t>инстансов</a:t>
+            </a:r>
+            <a:r>
+              <a:rPr lang="ru-RU" sz="2200" dirty="0" smtClean="0"/>
+              <a:t> за </a:t>
+            </a:r>
+            <a:r>
+              <a:rPr lang="ru-RU" sz="2200" dirty="0" err="1" smtClean="0"/>
+              <a:t>балансировщиком</a:t>
+            </a:r>
+            <a:r>
+              <a:rPr lang="ru-RU" sz="2200" dirty="0" smtClean="0"/>
+              <a:t> нагрузки), по методам (разные группы методов на разных серверах), а также через асинхронные вызовы и batch-запросы, снижающие количество сетевых обращений. Состояние при этом желательно хранить без состояния (</a:t>
+            </a:r>
+            <a:r>
+              <a:rPr lang="ru-RU" sz="2200" dirty="0" err="1" smtClean="0"/>
+              <a:t>stateless</a:t>
+            </a:r>
+            <a:r>
+              <a:rPr lang="ru-RU" sz="2200" dirty="0" smtClean="0"/>
+              <a:t>), чтобы любой </a:t>
+            </a:r>
+            <a:r>
+              <a:rPr lang="ru-RU" sz="2200" dirty="0" err="1" smtClean="0"/>
+              <a:t>инстанс</a:t>
+            </a:r>
+            <a:r>
+              <a:rPr lang="ru-RU" sz="2200" dirty="0" smtClean="0"/>
+              <a:t> мог обработать любой запрос.</a:t>
+            </a:r>
+            <a:endParaRPr lang="ru-RU" sz="2200" dirty="0"/>
+          </a:p>
+        </p:txBody>
+      </p:sp>
     </p:spTree>
   </p:cSld>
   <p:clrMapOvr>
